--- a/artifacts/speaking-portfolio-expanded/decks/evidence-learning-40min-handout.pptx
+++ b/artifacts/speaking-portfolio-expanded/decks/evidence-learning-40min-handout.pptx
@@ -201,7 +201,7 @@
                 <a:ea typeface="Arial"/>
                 <a:cs typeface="Arial"/>
               </a:rPr>
-              <a:t xml:space="preserve">[Presenter scripts](../packets/evidence-learning/script-40min.md) · [Packet](../packets/evidence-learning/packet.md) · [Walkthrough](../education/demo.md) · [Evidence](../packets/evidence-learning/evidence-bank.md) · [Working notes](../packets/evidence-learning/notes-2026-09-05.md)</a:t>
+              <a:t xml:space="preserve">[Presenter scripts](../packets/evidence-learning/script-40min.md) · [Packet](../packets/evidence-learning/packet.md) · [Walkthrough](../education/demo.md) · [Evidence](../packets/evidence-learning/evidence-bank.md) · [Procurement route](../packets/evidence-learning/procurement-route.md)</a:t>
             </a:r>
             <a:endParaRPr lang="en-US" sz="1200"/>
           </a:p>
@@ -247,7 +247,7 @@
                 <a:ea typeface="Arial"/>
                 <a:cs typeface="Arial"/>
               </a:rPr>
-              <a:t xml:space="preserve">Worked example: $100, up 20%, then down 20%. The Skeptic talk uses a different example so the two can be booked together. The smudged arithmetic sheet is the K-12 example.</a:t>
+              <a:t xml:space="preserve">Worked example: $100, up 20%, then down 20%. The smudged arithmetic sheet is the K-12 example. [Show Me the Misconception](../packets/evidence-learning/procurement-route.md), the 15-minute procurement route, uses the history-essay example instead, so a program can book both without hearing the percentage fixture twice.</a:t>
             </a:r>
             <a:endParaRPr lang="en-US" sz="1200"/>
           </a:p>
@@ -360,7 +360,7 @@
                 <a:ea typeface="Arial"/>
                 <a:cs typeface="Arial"/>
               </a:rPr>
-              <a:t xml:space="preserve">Score the reasoning, then write down what you saw</a:t>
+              <a:t xml:space="preserve">Score the reasoning. Write it down</a:t>
             </a:r>
             <a:endParaRPr lang="en-US" sz="1200"/>
           </a:p>
@@ -590,7 +590,7 @@
                 <a:ea typeface="Arial"/>
                 <a:cs typeface="Arial"/>
               </a:rPr>
-              <a:t xml:space="preserve">Zero: the wrong base persists. One: the right number, no explanation. Two: the learner explains the current amount. Help goes in its own column so a human can read it, and asking a question costs nothing. Try the rubric on sample work before it touches a grade.</a:t>
+              <a:t xml:space="preserve">Zero: the wrong base persists. One: the right number, no explanation. Two: the learner explains the current amount. Help goes in its own column so a human can read it, and asking a question costs nothing.</a:t>
             </a:r>
             <a:endParaRPr lang="en-US" sz="1200"/>
           </a:p>
@@ -774,7 +774,7 @@
                 <a:ea typeface="Arial"/>
                 <a:cs typeface="Arial"/>
               </a:rPr>
-              <a:t xml:space="preserve">Source: Bastani et al. (2025), [Generative AI without guardrails can harm learning](https://doi.org/10.1073/pnas.2422633122), PNAS. A [correction](https://doi.org/10.1073/pnas.2518204122) exists; check it before quoting figures.</a:t>
+              <a:t xml:space="preserve">Source: Bastani et al. (2025), [Generative AI without guardrails can harm learning](https://doi.org/10.1073/pnas.2422633122), PNAS. The [correction](https://doi.org/10.1073/pnas.2518204122) (August 2025) fixes an author affiliation; no result changed.</a:t>
             </a:r>
             <a:endParaRPr lang="en-US" sz="1200"/>
           </a:p>
@@ -1163,7 +1163,7 @@
                 <a:ea typeface="Arial"/>
                 <a:cs typeface="Arial"/>
               </a:rPr>
-              <a:t xml:space="preserve">Answering from memory and reading a model's output aloud produce different mistakes. The reader falls behind as the text wraps and jumps. They mispronounce a word they'd never have chosen. Spoken language carries enough tells to sort likely from unlikely, never to convict.</a:t>
+              <a:t xml:space="preserve">Answering from memory and reading a model's output aloud produce different mistakes. The reader falls behind as the text wraps and jumps. They mispronounce a word they'd never have chosen. Spoken language carries enough tells to sort likely from unlikely.</a:t>
             </a:r>
             <a:endParaRPr lang="en-US" sz="1200"/>
           </a:p>
@@ -1368,7 +1368,7 @@
                 <a:ea typeface="Arial"/>
                 <a:cs typeface="Arial"/>
               </a:rPr>
-              <a:t xml:space="preserve">Outsmart move three: count AI time, then read all 300 transcripts</a:t>
+              <a:t xml:space="preserve">Outsmart move three: read all 300 transcripts</a:t>
             </a:r>
             <a:endParaRPr lang="en-US" sz="1200"/>
           </a:p>
@@ -1690,7 +1690,7 @@
                 <a:ea typeface="Arial"/>
                 <a:cs typeface="Arial"/>
               </a:rPr>
-              <a:t xml:space="preserve">And know what you are up against when you read the model's summary instead of the transcript. Skitka and colleagues measured it in 1999: people given a highly but imperfectly reliable aid did worse than people given no aid at all, because it is right often enough that you stop checking. The summary is a place to start looking, never a place to stop.</a:t>
+              <a:t xml:space="preserve">And know what you are up against when you read the model's summary instead of the transcript. Skitka and colleagues measured it in 1999: people given a highly but imperfectly reliable aid did worse than people with no aid at all on the trials where the aid was wrong, because it is right often enough that you stop checking. The summary is a place to start looking, never a place to stop.</a:t>
             </a:r>
             <a:endParaRPr lang="en-US" sz="1200"/>
           </a:p>
@@ -3681,7 +3681,7 @@
                 <a:ea typeface="Arial"/>
                 <a:cs typeface="Arial"/>
               </a:rPr>
-              <a:t xml:space="preserve">Koedinger and Aleven (2007), [Exploring the Assistance Dilemma in Experiments with Cognitive Tutors](https://doi.org/10.1007/s10648-007-9049-0), Educational Psychology Review 19(3), 239 to 264. Cited on slide 3.</a:t>
+              <a:t xml:space="preserve">Koedinger and Aleven (2007), [Exploring the Assistance Dilemma in Experiments with Cognitive Tutors](https://doi.org/10.1007/s10648-007-9049-0), Educational Psychology Review 19(3), 239 to 264.</a:t>
             </a:r>
             <a:endParaRPr lang="en-US" sz="1200"/>
           </a:p>
@@ -3727,7 +3727,7 @@
                 <a:ea typeface="Arial"/>
                 <a:cs typeface="Arial"/>
               </a:rPr>
-              <a:t xml:space="preserve">Bastani et al. (2025), [Generative AI without guardrails can harm learning](https://doi.org/10.1073/pnas.2422633122), PNAS. A [correction](https://doi.org/10.1073/pnas.2518204122) exists; check it before quoting figures.</a:t>
+              <a:t xml:space="preserve">Bastani et al. (2025), [Generative AI without guardrails can harm learning](https://doi.org/10.1073/pnas.2422633122), PNAS. The [correction](https://doi.org/10.1073/pnas.2518204122) (August 2025) fixes an author affiliation; no result changed.</a:t>
             </a:r>
             <a:endParaRPr lang="en-US" sz="1200"/>
           </a:p>
@@ -4758,7 +4758,7 @@
                 <a:ea typeface="Arial"/>
                 <a:cs typeface="Arial"/>
               </a:rPr>
-              <a:t xml:space="preserve">The detector is the same trap in software. Liang and colleagues found the detectors they tested flagged non-native English writers at alarming rates. And even if a detector were perfect, it answers the wrong question. Who typed the sentence is not whether the kid can do the thing.</a:t>
+              <a:t xml:space="preserve">The detector is the same trap in software. Liang and colleagues found the detectors they tested flagged non-native English writers at alarming rates. And even if a detector were perfect, it answers the wrong question. Who typed the sentence is not whether the kid can do the thing. And if your assessment depends on knowing who typed a paragraph, the detector has become part of your curriculum.</a:t>
             </a:r>
             <a:endParaRPr lang="en-US" sz="1200"/>
           </a:p>
@@ -4917,7 +4917,7 @@
                 <a:ea typeface="Arial"/>
                 <a:cs typeface="Arial"/>
               </a:rPr>
-              <a:t xml:space="preserve">Write down where the foundations happen</a:t>
+              <a:t xml:space="preserve">Pencil first. Then the tool</a:t>
             </a:r>
             <a:endParaRPr lang="en-US" sz="1200"/>
           </a:p>
@@ -5217,6 +5217,52 @@
                 <a:cs typeface="Arial"/>
               </a:rPr>
               <a:t xml:space="preserve">This tension is older than the panic and it has a name. Koedinger and Aleven called it the assistance dilemma in 2007: give too much help and the learner never has to generate anything, give too little and they stall out. Nobody has solved it. Say that out loud, because a vendor whose tutor has the help level exactly right is selling you a solved version of an open problem.</a:t>
+            </a:r>
+            <a:endParaRPr lang="en-US" sz="1200"/>
+          </a:p>
+          <a:p>
+            <a:pPr marL="0" indent="0">
+              <a:lnSpc>
+                <a:spcPts val="1560"/>
+              </a:lnSpc>
+              <a:spcAft>
+                <a:spcPts val="0"/>
+              </a:spcAft>
+              <a:buNone/>
+            </a:pPr>
+            <a:r>
+              <a:rPr lang="en-US" sz="1200" b="0">
+                <a:solidFill>
+                  <a:srgbClr val="202b33"/>
+                </a:solidFill>
+                <a:latin typeface="Arial"/>
+                <a:ea typeface="Arial"/>
+                <a:cs typeface="Arial"/>
+              </a:rPr>
+              <a:t xml:space="preserve"/>
+            </a:r>
+            <a:endParaRPr lang="en-US" sz="1200"/>
+          </a:p>
+          <a:p>
+            <a:pPr marL="0" indent="0">
+              <a:lnSpc>
+                <a:spcPts val="1560"/>
+              </a:lnSpc>
+              <a:spcAft>
+                <a:spcPts val="0"/>
+              </a:spcAft>
+              <a:buNone/>
+            </a:pPr>
+            <a:r>
+              <a:rPr lang="en-US" sz="1200" b="0">
+                <a:solidFill>
+                  <a:srgbClr val="202b33"/>
+                </a:solidFill>
+                <a:latin typeface="Arial"/>
+                <a:ea typeface="Arial"/>
+                <a:cs typeface="Arial"/>
+              </a:rPr>
+              <a:t xml:space="preserve">Source: Koedinger and Aleven (2007), [Exploring the Assistance Dilemma in Experiments with Cognitive Tutors](https://doi.org/10.1007/s10648-007-9049-0), Educational Psychology Review 19(3), 239 to 264.</a:t>
             </a:r>
             <a:endParaRPr lang="en-US" sz="1200"/>
           </a:p>
@@ -5628,52 +5674,6 @@
                 <a:ea typeface="Arial"/>
                 <a:cs typeface="Arial"/>
               </a:rPr>
-              <a:t xml:space="preserve">Source: Koedinger and Aleven (2007), [Exploring the Assistance Dilemma in Experiments with Cognitive Tutors](https://doi.org/10.1007/s10648-007-9049-0), Educational Psychology Review 19(3), 239 to 264. Cited on slide 3.</a:t>
-            </a:r>
-            <a:endParaRPr lang="en-US" sz="1200"/>
-          </a:p>
-          <a:p>
-            <a:pPr marL="0" indent="0">
-              <a:lnSpc>
-                <a:spcPts val="1560"/>
-              </a:lnSpc>
-              <a:spcAft>
-                <a:spcPts val="0"/>
-              </a:spcAft>
-              <a:buNone/>
-            </a:pPr>
-            <a:r>
-              <a:rPr lang="en-US" sz="1200" b="0">
-                <a:solidFill>
-                  <a:srgbClr val="202b33"/>
-                </a:solidFill>
-                <a:latin typeface="Arial"/>
-                <a:ea typeface="Arial"/>
-                <a:cs typeface="Arial"/>
-              </a:rPr>
-              <a:t xml:space="preserve"/>
-            </a:r>
-            <a:endParaRPr lang="en-US" sz="1200"/>
-          </a:p>
-          <a:p>
-            <a:pPr marL="0" indent="0">
-              <a:lnSpc>
-                <a:spcPts val="1560"/>
-              </a:lnSpc>
-              <a:spcAft>
-                <a:spcPts val="0"/>
-              </a:spcAft>
-              <a:buNone/>
-            </a:pPr>
-            <a:r>
-              <a:rPr lang="en-US" sz="1200" b="0">
-                <a:solidFill>
-                  <a:srgbClr val="202b33"/>
-                </a:solidFill>
-                <a:latin typeface="Arial"/>
-                <a:ea typeface="Arial"/>
-                <a:cs typeface="Arial"/>
-              </a:rPr>
               <a:t xml:space="preserve">Stage direction: Ask the room what the final answer alone would have told you. One answer, then move.</a:t>
             </a:r>
             <a:endParaRPr lang="en-US" sz="1200"/>
@@ -6268,7 +6268,7 @@
                 <a:ea typeface="Arial"/>
                 <a:cs typeface="Arial"/>
               </a:rPr>
-              <a:t xml:space="preserve">Ask for an attempt, then ration the help</a:t>
+              <a:t xml:space="preserve">Ration the help</a:t>
             </a:r>
             <a:endParaRPr lang="en-US" sz="1200"/>
           </a:p>
@@ -6634,7 +6634,7 @@
                 <a:ea typeface="Arial"/>
                 <a:cs typeface="Arial"/>
               </a:rPr>
-              <a:t xml:space="preserve">Demo: the four-minute reconstruction</a:t>
+              <a:t xml:space="preserve">Demo: four minutes inside a five-minute slide</a:t>
             </a:r>
             <a:endParaRPr lang="en-US" sz="1200"/>
           </a:p>
@@ -6841,7 +6841,7 @@
                 <a:ea typeface="Arial"/>
                 <a:cs typeface="Arial"/>
               </a:rPr>
-              <a:t xml:space="preserve">Run the two scripted learners from the runbook, then go live. Reveal the wrong argument. Let the room find the base. Reveal $120 only after the diagnostic question. Ask for $96 and one sentence explaining it.</a:t>
+              <a:t xml:space="preserve">Run the scripted tutor turns — from the kit or read off the card — then go live. Reveal the wrong argument. Let the room find the base. Reveal $120 only after the diagnostic question. Ask for $96 and one sentence explaining it.</a:t>
             </a:r>
             <a:endParaRPr lang="en-US" sz="1200"/>
           </a:p>
@@ -6933,53 +6933,7 @@
                 <a:ea typeface="Arial"/>
                 <a:cs typeface="Arial"/>
               </a:rPr>
-              <a:t xml:space="preserve">If the room is quiet, present the prepared learner response. Never pressure an individual into a public assessment.</a:t>
-            </a:r>
-            <a:endParaRPr lang="en-US" sz="1200"/>
-          </a:p>
-          <a:p>
-            <a:pPr marL="0" indent="0">
-              <a:lnSpc>
-                <a:spcPts val="1560"/>
-              </a:lnSpc>
-              <a:spcAft>
-                <a:spcPts val="0"/>
-              </a:spcAft>
-              <a:buNone/>
-            </a:pPr>
-            <a:r>
-              <a:rPr lang="en-US" sz="1200" b="0">
-                <a:solidFill>
-                  <a:srgbClr val="202b33"/>
-                </a:solidFill>
-                <a:latin typeface="Arial"/>
-                <a:ea typeface="Arial"/>
-                <a:cs typeface="Arial"/>
-              </a:rPr>
-              <a:t xml:space="preserve"/>
-            </a:r>
-            <a:endParaRPr lang="en-US" sz="1200"/>
-          </a:p>
-          <a:p>
-            <a:pPr marL="0" indent="0">
-              <a:lnSpc>
-                <a:spcPts val="1560"/>
-              </a:lnSpc>
-              <a:spcAft>
-                <a:spcPts val="0"/>
-              </a:spcAft>
-              <a:buNone/>
-            </a:pPr>
-            <a:r>
-              <a:rPr lang="en-US" sz="1200" b="0">
-                <a:solidFill>
-                  <a:srgbClr val="202b33"/>
-                </a:solidFill>
-                <a:latin typeface="Arial"/>
-                <a:ea typeface="Arial"/>
-                <a:cs typeface="Arial"/>
-              </a:rPr>
-              <a:t xml:space="preserve">Stage direction: Runbook section 5 for the scripted turns. Two-minute compression: skip the kit, run only the $100 sequence, state the $80 item.</a:t>
+              <a:t xml:space="preserve">Stage direction: Runbook section 5 has the five scripted turns and the same table in print. If the room is quiet, present the prepared learner response; never pressure an individual into a public assessment. Two-minute compression: skip the kit, run only the $100 sequence, state the $80 item.</a:t>
             </a:r>
             <a:endParaRPr lang="en-US" sz="1200"/>
           </a:p>
@@ -7092,7 +7046,7 @@
                 <a:ea typeface="Arial"/>
                 <a:cs typeface="Arial"/>
               </a:rPr>
-              <a:t xml:space="preserve">Score the reasoning, then write down what you saw</a:t>
+              <a:t xml:space="preserve">Score the reasoning. Write it down</a:t>
             </a:r>
             <a:endParaRPr lang="en-US" sz="1200"/>
           </a:p>
@@ -7322,7 +7276,7 @@
                 <a:ea typeface="Arial"/>
                 <a:cs typeface="Arial"/>
               </a:rPr>
-              <a:t xml:space="preserve">Zero: the wrong base persists. One: the right number, no explanation. Two: the learner explains the current amount. Help goes in its own column so a human can read it, and asking a question costs nothing. Try the rubric on sample work before it touches a grade.</a:t>
+              <a:t xml:space="preserve">Zero: the wrong base persists. One: the right number, no explanation. Two: the learner explains the current amount. Help goes in its own column so a human can read it, and asking a question costs nothing.</a:t>
             </a:r>
             <a:endParaRPr lang="en-US" sz="1200"/>
           </a:p>
@@ -7506,7 +7460,7 @@
                 <a:ea typeface="Arial"/>
                 <a:cs typeface="Arial"/>
               </a:rPr>
-              <a:t xml:space="preserve">Source: Bastani et al. (2025), [Generative AI without guardrails can harm learning](https://doi.org/10.1073/pnas.2422633122), PNAS. A [correction](https://doi.org/10.1073/pnas.2518204122) exists; check it before quoting figures.</a:t>
+              <a:t xml:space="preserve">Source: Bastani et al. (2025), [Generative AI without guardrails can harm learning](https://doi.org/10.1073/pnas.2422633122), PNAS. The [correction](https://doi.org/10.1073/pnas.2518204122) (August 2025) fixes an author affiliation; no result changed.</a:t>
             </a:r>
             <a:endParaRPr lang="en-US" sz="1200"/>
           </a:p>
@@ -8158,30 +8112,7 @@
                 <a:ea typeface="Arial"/>
                 <a:cs typeface="Arial"/>
               </a:rPr>
-              <a:t xml:space="preserve">Score the reasoning, then write down what you saw</a:t>
-            </a:r>
-            <a:endParaRPr lang="en-US" sz="2550"/>
-          </a:p>
-          <a:p>
-            <a:pPr marL="0" indent="0">
-              <a:lnSpc>
-                <a:spcPts val="3060"/>
-              </a:lnSpc>
-              <a:spcAft>
-                <a:spcPts val="0"/>
-              </a:spcAft>
-              <a:buNone/>
-            </a:pPr>
-            <a:r>
-              <a:rPr lang="en-US" sz="2550" b="1">
-                <a:solidFill>
-                  <a:srgbClr val="202B33"/>
-                </a:solidFill>
-                <a:latin typeface="Arial"/>
-                <a:ea typeface="Arial"/>
-                <a:cs typeface="Arial"/>
-              </a:rPr>
-              <a:t xml:space="preserve">(continued)</a:t>
+              <a:t xml:space="preserve">Score the reasoning. Write it down (continued)</a:t>
             </a:r>
             <a:endParaRPr lang="en-US" sz="2550"/>
           </a:p>
@@ -9132,30 +9063,7 @@
                 <a:ea typeface="Arial"/>
                 <a:cs typeface="Arial"/>
               </a:rPr>
-              <a:t xml:space="preserve">enough tells to sort likely from unlikely,</a:t>
-            </a:r>
-            <a:endParaRPr lang="en-US" sz="1500"/>
-          </a:p>
-          <a:p>
-            <a:pPr marL="0" indent="0">
-              <a:lnSpc>
-                <a:spcPts val="1950"/>
-              </a:lnSpc>
-              <a:spcAft>
-                <a:spcPts val="0"/>
-              </a:spcAft>
-              <a:buNone/>
-            </a:pPr>
-            <a:r>
-              <a:rPr lang="en-US" sz="1500" b="0">
-                <a:solidFill>
-                  <a:srgbClr val="202B33"/>
-                </a:solidFill>
-                <a:latin typeface="Arial"/>
-                <a:ea typeface="Arial"/>
-                <a:cs typeface="Arial"/>
-              </a:rPr>
-              <a:t xml:space="preserve">never to convict.</a:t>
+              <a:t xml:space="preserve">enough tells to sort likely from unlikely.</a:t>
             </a:r>
             <a:endParaRPr lang="en-US" sz="1500"/>
           </a:p>
@@ -9962,30 +9870,7 @@
                 <a:ea typeface="Arial"/>
                 <a:cs typeface="Arial"/>
               </a:rPr>
-              <a:t xml:space="preserve">Outsmart move three: count AI time, then read all 300</a:t>
-            </a:r>
-            <a:endParaRPr lang="en-US" sz="2550"/>
-          </a:p>
-          <a:p>
-            <a:pPr marL="0" indent="0">
-              <a:lnSpc>
-                <a:spcPts val="3060"/>
-              </a:lnSpc>
-              <a:spcAft>
-                <a:spcPts val="0"/>
-              </a:spcAft>
-              <a:buNone/>
-            </a:pPr>
-            <a:r>
-              <a:rPr lang="en-US" sz="2550" b="1">
-                <a:solidFill>
-                  <a:srgbClr val="202B33"/>
-                </a:solidFill>
-                <a:latin typeface="Arial"/>
-                <a:ea typeface="Arial"/>
-                <a:cs typeface="Arial"/>
-              </a:rPr>
-              <a:t xml:space="preserve">transcripts</a:t>
+              <a:t xml:space="preserve">Outsmart move three: read all 300 transcripts</a:t>
             </a:r>
             <a:endParaRPr lang="en-US" sz="2550"/>
           </a:p>
@@ -10429,6 +10314,29 @@
             </a:r>
             <a:endParaRPr lang="en-US" sz="1500"/>
           </a:p>
+          <a:p>
+            <a:pPr marL="0" indent="0">
+              <a:lnSpc>
+                <a:spcPts val="1950"/>
+              </a:lnSpc>
+              <a:spcAft>
+                <a:spcPts val="0"/>
+              </a:spcAft>
+              <a:buNone/>
+            </a:pPr>
+            <a:r>
+              <a:rPr lang="en-US" sz="1500" b="0">
+                <a:solidFill>
+                  <a:srgbClr val="202B33"/>
+                </a:solidFill>
+                <a:latin typeface="Arial"/>
+                <a:ea typeface="Arial"/>
+                <a:cs typeface="Arial"/>
+              </a:rPr>
+              <a:t xml:space="preserve">a line of inquiry I didn't teach. Show me</a:t>
+            </a:r>
+            <a:endParaRPr lang="en-US" sz="1500"/>
+          </a:p>
         </p:txBody>
       </p:sp>
       <p:sp>
@@ -10474,29 +10382,6 @@
                 <a:ea typeface="Arial"/>
                 <a:cs typeface="Arial"/>
               </a:rPr>
-              <a:t xml:space="preserve">a line of inquiry I didn't teach. Show me</a:t>
-            </a:r>
-            <a:endParaRPr lang="en-US" sz="1500"/>
-          </a:p>
-          <a:p>
-            <a:pPr marL="0" indent="0">
-              <a:lnSpc>
-                <a:spcPts val="1950"/>
-              </a:lnSpc>
-              <a:spcAft>
-                <a:spcPts val="0"/>
-              </a:spcAft>
-              <a:buNone/>
-            </a:pPr>
-            <a:r>
-              <a:rPr lang="en-US" sz="1500" b="0">
-                <a:solidFill>
-                  <a:srgbClr val="202B33"/>
-                </a:solidFill>
-                <a:latin typeface="Arial"/>
-                <a:ea typeface="Arial"/>
-                <a:cs typeface="Arial"/>
-              </a:rPr>
               <a:t xml:space="preserve">the one who reached the answer by a path</a:t>
             </a:r>
             <a:endParaRPr lang="en-US" sz="1500"/>
@@ -10796,7 +10681,30 @@
                 <a:ea typeface="Arial"/>
                 <a:cs typeface="Arial"/>
               </a:rPr>
-              <a:t xml:space="preserve">people given no aid at all, because it is</a:t>
+              <a:t xml:space="preserve">people with no aid at all on the trials</a:t>
+            </a:r>
+            <a:endParaRPr lang="en-US" sz="1500"/>
+          </a:p>
+          <a:p>
+            <a:pPr marL="0" indent="0">
+              <a:lnSpc>
+                <a:spcPts val="1950"/>
+              </a:lnSpc>
+              <a:spcAft>
+                <a:spcPts val="0"/>
+              </a:spcAft>
+              <a:buNone/>
+            </a:pPr>
+            <a:r>
+              <a:rPr lang="en-US" sz="1500" b="0">
+                <a:solidFill>
+                  <a:srgbClr val="202B33"/>
+                </a:solidFill>
+                <a:latin typeface="Arial"/>
+                <a:ea typeface="Arial"/>
+                <a:cs typeface="Arial"/>
+              </a:rPr>
+              <a:t xml:space="preserve">where the aid was wrong, because it is</a:t>
             </a:r>
             <a:endParaRPr lang="en-US" sz="1500"/>
           </a:p>
@@ -15326,7 +15234,7 @@
                 <a:ea typeface="Arial"/>
                 <a:cs typeface="Arial"/>
               </a:rPr>
-              <a:t xml:space="preserve">264. Cited on slide 3.</a:t>
+              <a:t xml:space="preserve">264.</a:t>
             </a:r>
             <a:endParaRPr lang="en-US" sz="1500"/>
           </a:p>
@@ -15441,30 +15349,53 @@
                 <a:ea typeface="Arial"/>
                 <a:cs typeface="Arial"/>
               </a:rPr>
-              <a:t xml:space="preserve">PNAS. A</a:t>
-            </a:r>
-            <a:endParaRPr lang="en-US" sz="1500"/>
-          </a:p>
-          <a:p>
-            <a:pPr marL="0" indent="0">
-              <a:lnSpc>
-                <a:spcPts val="1950"/>
-              </a:lnSpc>
-              <a:spcAft>
-                <a:spcPts val="0"/>
-              </a:spcAft>
-              <a:buNone/>
-            </a:pPr>
-            <a:r>
-              <a:rPr lang="en-US" sz="1500" b="0">
-                <a:solidFill>
-                  <a:srgbClr val="202B33"/>
-                </a:solidFill>
-                <a:latin typeface="Arial"/>
-                <a:ea typeface="Arial"/>
-                <a:cs typeface="Arial"/>
-              </a:rPr>
-              <a:t xml:space="preserve">[correction](https://doi.org/10.1073/pnas.2518204122</a:t>
+              <a:t xml:space="preserve">PNAS. The</a:t>
+            </a:r>
+            <a:endParaRPr lang="en-US" sz="1500"/>
+          </a:p>
+          <a:p>
+            <a:pPr marL="0" indent="0">
+              <a:lnSpc>
+                <a:spcPts val="1950"/>
+              </a:lnSpc>
+              <a:spcAft>
+                <a:spcPts val="0"/>
+              </a:spcAft>
+              <a:buNone/>
+            </a:pPr>
+            <a:r>
+              <a:rPr lang="en-US" sz="1500" b="0">
+                <a:solidFill>
+                  <a:srgbClr val="202B33"/>
+                </a:solidFill>
+                <a:latin typeface="Arial"/>
+                <a:ea typeface="Arial"/>
+                <a:cs typeface="Arial"/>
+              </a:rPr>
+              <a:t xml:space="preserve">[correction](https://doi.org/10.1073/pnas.2518204122)</a:t>
+            </a:r>
+            <a:endParaRPr lang="en-US" sz="1500"/>
+          </a:p>
+          <a:p>
+            <a:pPr marL="0" indent="0">
+              <a:lnSpc>
+                <a:spcPts val="1950"/>
+              </a:lnSpc>
+              <a:spcAft>
+                <a:spcPts val="0"/>
+              </a:spcAft>
+              <a:buNone/>
+            </a:pPr>
+            <a:r>
+              <a:rPr lang="en-US" sz="1500" b="0">
+                <a:solidFill>
+                  <a:srgbClr val="202B33"/>
+                </a:solidFill>
+                <a:latin typeface="Arial"/>
+                <a:ea typeface="Arial"/>
+                <a:cs typeface="Arial"/>
+              </a:rPr>
+              <a:t xml:space="preserve">(August 2025 fixes an author affiliation;</a:t>
             </a:r>
             <a:endParaRPr lang="en-US" sz="1500"/>
           </a:p>
@@ -15513,7 +15444,7 @@
                 <a:ea typeface="Arial"/>
                 <a:cs typeface="Arial"/>
               </a:rPr>
-              <a:t xml:space="preserve">exists; check it before quoting figures.</a:t>
+              <a:t xml:space="preserve">no result changed.</a:t>
             </a:r>
             <a:endParaRPr lang="en-US" sz="1500"/>
           </a:p>
@@ -17387,6 +17318,52 @@
             </a:r>
             <a:endParaRPr lang="en-US" sz="1500"/>
           </a:p>
+          <a:p>
+            <a:pPr marL="0" indent="0">
+              <a:lnSpc>
+                <a:spcPts val="1950"/>
+              </a:lnSpc>
+              <a:spcAft>
+                <a:spcPts val="0"/>
+              </a:spcAft>
+              <a:buNone/>
+            </a:pPr>
+            <a:r>
+              <a:rPr lang="en-US" sz="1500" b="0">
+                <a:solidFill>
+                  <a:srgbClr val="202B33"/>
+                </a:solidFill>
+                <a:latin typeface="Arial"/>
+                <a:ea typeface="Arial"/>
+                <a:cs typeface="Arial"/>
+              </a:rPr>
+              <a:t xml:space="preserve">caught, there's no stigma for using</a:t>
+            </a:r>
+            <a:endParaRPr lang="en-US" sz="1500"/>
+          </a:p>
+          <a:p>
+            <a:pPr marL="0" indent="0">
+              <a:lnSpc>
+                <a:spcPts val="1950"/>
+              </a:lnSpc>
+              <a:spcAft>
+                <a:spcPts val="0"/>
+              </a:spcAft>
+              <a:buNone/>
+            </a:pPr>
+            <a:r>
+              <a:rPr lang="en-US" sz="1500" b="0">
+                <a:solidFill>
+                  <a:srgbClr val="202B33"/>
+                </a:solidFill>
+                <a:latin typeface="Arial"/>
+                <a:ea typeface="Arial"/>
+                <a:cs typeface="Arial"/>
+              </a:rPr>
+              <a:t xml:space="preserve">something as common as a phone.</a:t>
+            </a:r>
+            <a:endParaRPr lang="en-US" sz="1500"/>
+          </a:p>
         </p:txBody>
       </p:sp>
       <p:sp>
@@ -17432,52 +17409,6 @@
                 <a:ea typeface="Arial"/>
                 <a:cs typeface="Arial"/>
               </a:rPr>
-              <a:t xml:space="preserve">caught, there's no stigma for using</a:t>
-            </a:r>
-            <a:endParaRPr lang="en-US" sz="1500"/>
-          </a:p>
-          <a:p>
-            <a:pPr marL="0" indent="0">
-              <a:lnSpc>
-                <a:spcPts val="1950"/>
-              </a:lnSpc>
-              <a:spcAft>
-                <a:spcPts val="0"/>
-              </a:spcAft>
-              <a:buNone/>
-            </a:pPr>
-            <a:r>
-              <a:rPr lang="en-US" sz="1500" b="0">
-                <a:solidFill>
-                  <a:srgbClr val="202B33"/>
-                </a:solidFill>
-                <a:latin typeface="Arial"/>
-                <a:ea typeface="Arial"/>
-                <a:cs typeface="Arial"/>
-              </a:rPr>
-              <a:t xml:space="preserve">something as common as a phone.</a:t>
-            </a:r>
-            <a:endParaRPr lang="en-US" sz="1500"/>
-          </a:p>
-          <a:p>
-            <a:pPr marL="0" indent="0">
-              <a:lnSpc>
-                <a:spcPts val="1950"/>
-              </a:lnSpc>
-              <a:spcAft>
-                <a:spcPts val="0"/>
-              </a:spcAft>
-              <a:buNone/>
-            </a:pPr>
-            <a:r>
-              <a:rPr lang="en-US" sz="1500" b="0">
-                <a:solidFill>
-                  <a:srgbClr val="202B33"/>
-                </a:solidFill>
-                <a:latin typeface="Arial"/>
-                <a:ea typeface="Arial"/>
-                <a:cs typeface="Arial"/>
-              </a:rPr>
               <a:t xml:space="preserve"/>
             </a:r>
             <a:endParaRPr lang="en-US" sz="1500"/>
@@ -17800,7 +17731,76 @@
                 <a:ea typeface="Arial"/>
                 <a:cs typeface="Arial"/>
               </a:rPr>
-              <a:t xml:space="preserve">whether the kid can do the thing.</a:t>
+              <a:t xml:space="preserve">whether the kid can do the thing. And if</a:t>
+            </a:r>
+            <a:endParaRPr lang="en-US" sz="1500"/>
+          </a:p>
+          <a:p>
+            <a:pPr marL="0" indent="0">
+              <a:lnSpc>
+                <a:spcPts val="1950"/>
+              </a:lnSpc>
+              <a:spcAft>
+                <a:spcPts val="0"/>
+              </a:spcAft>
+              <a:buNone/>
+            </a:pPr>
+            <a:r>
+              <a:rPr lang="en-US" sz="1500" b="0">
+                <a:solidFill>
+                  <a:srgbClr val="202B33"/>
+                </a:solidFill>
+                <a:latin typeface="Arial"/>
+                <a:ea typeface="Arial"/>
+                <a:cs typeface="Arial"/>
+              </a:rPr>
+              <a:t xml:space="preserve">your assessment depends on knowing who</a:t>
+            </a:r>
+            <a:endParaRPr lang="en-US" sz="1500"/>
+          </a:p>
+          <a:p>
+            <a:pPr marL="0" indent="0">
+              <a:lnSpc>
+                <a:spcPts val="1950"/>
+              </a:lnSpc>
+              <a:spcAft>
+                <a:spcPts val="0"/>
+              </a:spcAft>
+              <a:buNone/>
+            </a:pPr>
+            <a:r>
+              <a:rPr lang="en-US" sz="1500" b="0">
+                <a:solidFill>
+                  <a:srgbClr val="202B33"/>
+                </a:solidFill>
+                <a:latin typeface="Arial"/>
+                <a:ea typeface="Arial"/>
+                <a:cs typeface="Arial"/>
+              </a:rPr>
+              <a:t xml:space="preserve">typed a paragraph, the detector has become</a:t>
+            </a:r>
+            <a:endParaRPr lang="en-US" sz="1500"/>
+          </a:p>
+          <a:p>
+            <a:pPr marL="0" indent="0">
+              <a:lnSpc>
+                <a:spcPts val="1950"/>
+              </a:lnSpc>
+              <a:spcAft>
+                <a:spcPts val="0"/>
+              </a:spcAft>
+              <a:buNone/>
+            </a:pPr>
+            <a:r>
+              <a:rPr lang="en-US" sz="1500" b="0">
+                <a:solidFill>
+                  <a:srgbClr val="202B33"/>
+                </a:solidFill>
+                <a:latin typeface="Arial"/>
+                <a:ea typeface="Arial"/>
+                <a:cs typeface="Arial"/>
+              </a:rPr>
+              <a:t xml:space="preserve">part of your curriculum.</a:t>
             </a:r>
             <a:endParaRPr lang="en-US" sz="1500"/>
           </a:p>
@@ -18029,7 +18029,7 @@
                 <a:ea typeface="Arial"/>
                 <a:cs typeface="Arial"/>
               </a:rPr>
-              <a:t xml:space="preserve">Write down where the foundations happen</a:t>
+              <a:t xml:space="preserve">Pencil first. Then the tool</a:t>
             </a:r>
             <a:endParaRPr lang="en-US" sz="2550"/>
           </a:p>
@@ -20896,7 +20896,7 @@
                 <a:ea typeface="Arial"/>
                 <a:cs typeface="Arial"/>
               </a:rPr>
-              <a:t xml:space="preserve">Ask for an attempt, then ration the help</a:t>
+              <a:t xml:space="preserve">Ration the help</a:t>
             </a:r>
             <a:endParaRPr lang="en-US" sz="2550"/>
           </a:p>
@@ -21752,7 +21752,7 @@
                 <a:ea typeface="Arial"/>
                 <a:cs typeface="Arial"/>
               </a:rPr>
-              <a:t xml:space="preserve">Demo: the four-minute reconstruction</a:t>
+              <a:t xml:space="preserve">Demo: four minutes inside a five-minute slide</a:t>
             </a:r>
             <a:endParaRPr lang="en-US" sz="2550"/>
           </a:p>
@@ -21916,76 +21916,76 @@
                 <a:ea typeface="Arial"/>
                 <a:cs typeface="Arial"/>
               </a:rPr>
-              <a:t xml:space="preserve">Run the two scripted learners from the</a:t>
-            </a:r>
-            <a:endParaRPr lang="en-US" sz="1500"/>
-          </a:p>
-          <a:p>
-            <a:pPr marL="0" indent="0">
-              <a:lnSpc>
-                <a:spcPts val="1950"/>
-              </a:lnSpc>
-              <a:spcAft>
-                <a:spcPts val="0"/>
-              </a:spcAft>
-              <a:buNone/>
-            </a:pPr>
-            <a:r>
-              <a:rPr lang="en-US" sz="1500" b="0">
-                <a:solidFill>
-                  <a:srgbClr val="202B33"/>
-                </a:solidFill>
-                <a:latin typeface="Arial"/>
-                <a:ea typeface="Arial"/>
-                <a:cs typeface="Arial"/>
-              </a:rPr>
-              <a:t xml:space="preserve">runbook, then go live. Reveal the wrong</a:t>
-            </a:r>
-            <a:endParaRPr lang="en-US" sz="1500"/>
-          </a:p>
-          <a:p>
-            <a:pPr marL="0" indent="0">
-              <a:lnSpc>
-                <a:spcPts val="1950"/>
-              </a:lnSpc>
-              <a:spcAft>
-                <a:spcPts val="0"/>
-              </a:spcAft>
-              <a:buNone/>
-            </a:pPr>
-            <a:r>
-              <a:rPr lang="en-US" sz="1500" b="0">
-                <a:solidFill>
-                  <a:srgbClr val="202B33"/>
-                </a:solidFill>
-                <a:latin typeface="Arial"/>
-                <a:ea typeface="Arial"/>
-                <a:cs typeface="Arial"/>
-              </a:rPr>
-              <a:t xml:space="preserve">argument. Let the room find the base.</a:t>
-            </a:r>
-            <a:endParaRPr lang="en-US" sz="1500"/>
-          </a:p>
-          <a:p>
-            <a:pPr marL="0" indent="0">
-              <a:lnSpc>
-                <a:spcPts val="1950"/>
-              </a:lnSpc>
-              <a:spcAft>
-                <a:spcPts val="0"/>
-              </a:spcAft>
-              <a:buNone/>
-            </a:pPr>
-            <a:r>
-              <a:rPr lang="en-US" sz="1500" b="0">
-                <a:solidFill>
-                  <a:srgbClr val="202B33"/>
-                </a:solidFill>
-                <a:latin typeface="Arial"/>
-                <a:ea typeface="Arial"/>
-                <a:cs typeface="Arial"/>
-              </a:rPr>
-              <a:t xml:space="preserve">Reveal $120 only after the diagnostic</a:t>
+              <a:t xml:space="preserve">Run the scripted tutor turns — from the kit</a:t>
+            </a:r>
+            <a:endParaRPr lang="en-US" sz="1500"/>
+          </a:p>
+          <a:p>
+            <a:pPr marL="0" indent="0">
+              <a:lnSpc>
+                <a:spcPts val="1950"/>
+              </a:lnSpc>
+              <a:spcAft>
+                <a:spcPts val="0"/>
+              </a:spcAft>
+              <a:buNone/>
+            </a:pPr>
+            <a:r>
+              <a:rPr lang="en-US" sz="1500" b="0">
+                <a:solidFill>
+                  <a:srgbClr val="202B33"/>
+                </a:solidFill>
+                <a:latin typeface="Arial"/>
+                <a:ea typeface="Arial"/>
+                <a:cs typeface="Arial"/>
+              </a:rPr>
+              <a:t xml:space="preserve">or read off the card — then go live. Reveal</a:t>
+            </a:r>
+            <a:endParaRPr lang="en-US" sz="1500"/>
+          </a:p>
+          <a:p>
+            <a:pPr marL="0" indent="0">
+              <a:lnSpc>
+                <a:spcPts val="1950"/>
+              </a:lnSpc>
+              <a:spcAft>
+                <a:spcPts val="0"/>
+              </a:spcAft>
+              <a:buNone/>
+            </a:pPr>
+            <a:r>
+              <a:rPr lang="en-US" sz="1500" b="0">
+                <a:solidFill>
+                  <a:srgbClr val="202B33"/>
+                </a:solidFill>
+                <a:latin typeface="Arial"/>
+                <a:ea typeface="Arial"/>
+                <a:cs typeface="Arial"/>
+              </a:rPr>
+              <a:t xml:space="preserve">the wrong argument. Let the room find the</a:t>
+            </a:r>
+            <a:endParaRPr lang="en-US" sz="1500"/>
+          </a:p>
+          <a:p>
+            <a:pPr marL="0" indent="0">
+              <a:lnSpc>
+                <a:spcPts val="1950"/>
+              </a:lnSpc>
+              <a:spcAft>
+                <a:spcPts val="0"/>
+              </a:spcAft>
+              <a:buNone/>
+            </a:pPr>
+            <a:r>
+              <a:rPr lang="en-US" sz="1500" b="0">
+                <a:solidFill>
+                  <a:srgbClr val="202B33"/>
+                </a:solidFill>
+                <a:latin typeface="Arial"/>
+                <a:ea typeface="Arial"/>
+                <a:cs typeface="Arial"/>
+              </a:rPr>
+              <a:t xml:space="preserve">base. Reveal $120 only after the diagnostic</a:t>
             </a:r>
             <a:endParaRPr lang="en-US" sz="1500"/>
           </a:p>
@@ -22032,52 +22032,6 @@
                 <a:cs typeface="Arial"/>
               </a:rPr>
               <a:t xml:space="preserve">explaining it.</a:t>
-            </a:r>
-            <a:endParaRPr lang="en-US" sz="1500"/>
-          </a:p>
-          <a:p>
-            <a:pPr marL="0" indent="0">
-              <a:lnSpc>
-                <a:spcPts val="1950"/>
-              </a:lnSpc>
-              <a:spcAft>
-                <a:spcPts val="0"/>
-              </a:spcAft>
-              <a:buNone/>
-            </a:pPr>
-            <a:r>
-              <a:rPr lang="en-US" sz="1500" b="0">
-                <a:solidFill>
-                  <a:srgbClr val="202B33"/>
-                </a:solidFill>
-                <a:latin typeface="Arial"/>
-                <a:ea typeface="Arial"/>
-                <a:cs typeface="Arial"/>
-              </a:rPr>
-              <a:t xml:space="preserve"/>
-            </a:r>
-            <a:endParaRPr lang="en-US" sz="1500"/>
-          </a:p>
-          <a:p>
-            <a:pPr marL="0" indent="0">
-              <a:lnSpc>
-                <a:spcPts val="1950"/>
-              </a:lnSpc>
-              <a:spcAft>
-                <a:spcPts val="0"/>
-              </a:spcAft>
-              <a:buNone/>
-            </a:pPr>
-            <a:r>
-              <a:rPr lang="en-US" sz="1500" b="0">
-                <a:solidFill>
-                  <a:srgbClr val="202B33"/>
-                </a:solidFill>
-                <a:latin typeface="Arial"/>
-                <a:ea typeface="Arial"/>
-                <a:cs typeface="Arial"/>
-              </a:rPr>
-              <a:t xml:space="preserve">Then change the numbers: $80, up 25%, down</a:t>
             </a:r>
             <a:endParaRPr lang="en-US" sz="1500"/>
           </a:p>
@@ -22126,6 +22080,52 @@
                 <a:ea typeface="Arial"/>
                 <a:cs typeface="Arial"/>
               </a:rPr>
+              <a:t xml:space="preserve"/>
+            </a:r>
+            <a:endParaRPr lang="en-US" sz="1500"/>
+          </a:p>
+          <a:p>
+            <a:pPr marL="0" indent="0">
+              <a:lnSpc>
+                <a:spcPts val="1950"/>
+              </a:lnSpc>
+              <a:spcAft>
+                <a:spcPts val="0"/>
+              </a:spcAft>
+              <a:buNone/>
+            </a:pPr>
+            <a:r>
+              <a:rPr lang="en-US" sz="1500" b="0">
+                <a:solidFill>
+                  <a:srgbClr val="202B33"/>
+                </a:solidFill>
+                <a:latin typeface="Arial"/>
+                <a:ea typeface="Arial"/>
+                <a:cs typeface="Arial"/>
+              </a:rPr>
+              <a:t xml:space="preserve">Then change the numbers: $80, up 25%, down</a:t>
+            </a:r>
+            <a:endParaRPr lang="en-US" sz="1500"/>
+          </a:p>
+          <a:p>
+            <a:pPr marL="0" indent="0">
+              <a:lnSpc>
+                <a:spcPts val="1950"/>
+              </a:lnSpc>
+              <a:spcAft>
+                <a:spcPts val="0"/>
+              </a:spcAft>
+              <a:buNone/>
+            </a:pPr>
+            <a:r>
+              <a:rPr lang="en-US" sz="1500" b="0">
+                <a:solidFill>
+                  <a:srgbClr val="202B33"/>
+                </a:solidFill>
+                <a:latin typeface="Arial"/>
+                <a:ea typeface="Arial"/>
+                <a:cs typeface="Arial"/>
+              </a:rPr>
               <a:t xml:space="preserve">20%. It comes back to $80, because 1.25</a:t>
             </a:r>
             <a:endParaRPr lang="en-US" sz="1500"/>
@@ -22288,98 +22288,6 @@
                 <a:cs typeface="Arial"/>
               </a:rPr>
               <a:t xml:space="preserve">the example.</a:t>
-            </a:r>
-            <a:endParaRPr lang="en-US" sz="1500"/>
-          </a:p>
-          <a:p>
-            <a:pPr marL="0" indent="0">
-              <a:lnSpc>
-                <a:spcPts val="1950"/>
-              </a:lnSpc>
-              <a:spcAft>
-                <a:spcPts val="0"/>
-              </a:spcAft>
-              <a:buNone/>
-            </a:pPr>
-            <a:r>
-              <a:rPr lang="en-US" sz="1500" b="0">
-                <a:solidFill>
-                  <a:srgbClr val="202B33"/>
-                </a:solidFill>
-                <a:latin typeface="Arial"/>
-                <a:ea typeface="Arial"/>
-                <a:cs typeface="Arial"/>
-              </a:rPr>
-              <a:t xml:space="preserve"/>
-            </a:r>
-            <a:endParaRPr lang="en-US" sz="1500"/>
-          </a:p>
-          <a:p>
-            <a:pPr marL="0" indent="0">
-              <a:lnSpc>
-                <a:spcPts val="1950"/>
-              </a:lnSpc>
-              <a:spcAft>
-                <a:spcPts val="0"/>
-              </a:spcAft>
-              <a:buNone/>
-            </a:pPr>
-            <a:r>
-              <a:rPr lang="en-US" sz="1500" b="0">
-                <a:solidFill>
-                  <a:srgbClr val="202B33"/>
-                </a:solidFill>
-                <a:latin typeface="Arial"/>
-                <a:ea typeface="Arial"/>
-                <a:cs typeface="Arial"/>
-              </a:rPr>
-              <a:t xml:space="preserve">If the room is quiet, present the prepared</a:t>
-            </a:r>
-            <a:endParaRPr lang="en-US" sz="1500"/>
-          </a:p>
-          <a:p>
-            <a:pPr marL="0" indent="0">
-              <a:lnSpc>
-                <a:spcPts val="1950"/>
-              </a:lnSpc>
-              <a:spcAft>
-                <a:spcPts val="0"/>
-              </a:spcAft>
-              <a:buNone/>
-            </a:pPr>
-            <a:r>
-              <a:rPr lang="en-US" sz="1500" b="0">
-                <a:solidFill>
-                  <a:srgbClr val="202B33"/>
-                </a:solidFill>
-                <a:latin typeface="Arial"/>
-                <a:ea typeface="Arial"/>
-                <a:cs typeface="Arial"/>
-              </a:rPr>
-              <a:t xml:space="preserve">learner response. Never pressure an</a:t>
-            </a:r>
-            <a:endParaRPr lang="en-US" sz="1500"/>
-          </a:p>
-          <a:p>
-            <a:pPr marL="0" indent="0">
-              <a:lnSpc>
-                <a:spcPts val="1950"/>
-              </a:lnSpc>
-              <a:spcAft>
-                <a:spcPts val="0"/>
-              </a:spcAft>
-              <a:buNone/>
-            </a:pPr>
-            <a:r>
-              <a:rPr lang="en-US" sz="1500" b="0">
-                <a:solidFill>
-                  <a:srgbClr val="202B33"/>
-                </a:solidFill>
-                <a:latin typeface="Arial"/>
-                <a:ea typeface="Arial"/>
-                <a:cs typeface="Arial"/>
-              </a:rPr>
-              <a:t xml:space="preserve">individual into a public assessment.</a:t>
             </a:r>
             <a:endParaRPr lang="en-US" sz="1500"/>
           </a:p>
@@ -22608,7 +22516,7 @@
                 <a:ea typeface="Arial"/>
                 <a:cs typeface="Arial"/>
               </a:rPr>
-              <a:t xml:space="preserve">Score the reasoning, then write down what you saw</a:t>
+              <a:t xml:space="preserve">Score the reasoning. Write it down</a:t>
             </a:r>
             <a:endParaRPr lang="en-US" sz="2550"/>
           </a:p>
@@ -23002,52 +22910,6 @@
                 <a:ea typeface="Arial"/>
                 <a:cs typeface="Arial"/>
               </a:rPr>
-              <a:t xml:space="preserve">Try the rubric on sample work before it</a:t>
-            </a:r>
-            <a:endParaRPr lang="en-US" sz="1500"/>
-          </a:p>
-          <a:p>
-            <a:pPr marL="0" indent="0">
-              <a:lnSpc>
-                <a:spcPts val="1950"/>
-              </a:lnSpc>
-              <a:spcAft>
-                <a:spcPts val="0"/>
-              </a:spcAft>
-              <a:buNone/>
-            </a:pPr>
-            <a:r>
-              <a:rPr lang="en-US" sz="1500" b="0">
-                <a:solidFill>
-                  <a:srgbClr val="202B33"/>
-                </a:solidFill>
-                <a:latin typeface="Arial"/>
-                <a:ea typeface="Arial"/>
-                <a:cs typeface="Arial"/>
-              </a:rPr>
-              <a:t xml:space="preserve">touches a grade.</a:t>
-            </a:r>
-            <a:endParaRPr lang="en-US" sz="1500"/>
-          </a:p>
-          <a:p>
-            <a:pPr marL="0" indent="0">
-              <a:lnSpc>
-                <a:spcPts val="1950"/>
-              </a:lnSpc>
-              <a:spcAft>
-                <a:spcPts val="0"/>
-              </a:spcAft>
-              <a:buNone/>
-            </a:pPr>
-            <a:r>
-              <a:rPr lang="en-US" sz="1500" b="0">
-                <a:solidFill>
-                  <a:srgbClr val="202B33"/>
-                </a:solidFill>
-                <a:latin typeface="Arial"/>
-                <a:ea typeface="Arial"/>
-                <a:cs typeface="Arial"/>
-              </a:rPr>
               <a:t xml:space="preserve"/>
             </a:r>
             <a:endParaRPr lang="en-US" sz="1500"/>
@@ -23072,6 +22934,29 @@
                 <a:cs typeface="Arial"/>
               </a:rPr>
               <a:t xml:space="preserve">The record is four lines. Concept: changing</a:t>
+            </a:r>
+            <a:endParaRPr lang="en-US" sz="1500"/>
+          </a:p>
+          <a:p>
+            <a:pPr marL="0" indent="0">
+              <a:lnSpc>
+                <a:spcPts val="1950"/>
+              </a:lnSpc>
+              <a:spcAft>
+                <a:spcPts val="0"/>
+              </a:spcAft>
+              <a:buNone/>
+            </a:pPr>
+            <a:r>
+              <a:rPr lang="en-US" sz="1500" b="0">
+                <a:solidFill>
+                  <a:srgbClr val="202B33"/>
+                </a:solidFill>
+                <a:latin typeface="Arial"/>
+                <a:ea typeface="Arial"/>
+                <a:cs typeface="Arial"/>
+              </a:rPr>
+              <a:t xml:space="preserve">percentage base. Observed: used the</a:t>
             </a:r>
             <a:endParaRPr lang="en-US" sz="1500"/>
           </a:p>
@@ -23101,29 +22986,6 @@
             <a:noAutofit/>
           </a:bodyPr>
           <a:lstStyle/>
-          <a:p>
-            <a:pPr marL="0" indent="0">
-              <a:lnSpc>
-                <a:spcPts val="1950"/>
-              </a:lnSpc>
-              <a:spcAft>
-                <a:spcPts val="0"/>
-              </a:spcAft>
-              <a:buNone/>
-            </a:pPr>
-            <a:r>
-              <a:rPr lang="en-US" sz="1500" b="0">
-                <a:solidFill>
-                  <a:srgbClr val="202B33"/>
-                </a:solidFill>
-                <a:latin typeface="Arial"/>
-                <a:ea typeface="Arial"/>
-                <a:cs typeface="Arial"/>
-              </a:rPr>
-              <a:t xml:space="preserve">percentage base. Observed: used the</a:t>
-            </a:r>
-            <a:endParaRPr lang="en-US" sz="1500"/>
-          </a:p>
           <a:p>
             <a:pPr marL="0" indent="0">
               <a:lnSpc>
